--- a/Карта детства.pptx
+++ b/Карта детства.pptx
@@ -15,6 +15,8 @@
     <p:sldId id="263" r:id="rId9"/>
     <p:sldId id="264" r:id="rId10"/>
     <p:sldId id="265" r:id="rId11"/>
+    <p:sldId id="266" r:id="rId12"/>
+    <p:sldId id="267" r:id="rId13"/>
   </p:sldIdLst>
   <p:sldSz cx="12192000" cy="6858000"/>
   <p:notesSz cx="6858000" cy="9144000"/>
@@ -113,6 +115,11 @@
       </a:defRPr>
     </a:lvl9pPr>
   </p:defaultTextStyle>
+  <p:extLst>
+    <p:ext uri="{EFAFB233-063F-42B5-8137-9DF3F51BA10A}">
+      <p15:sldGuideLst xmlns:p15="http://schemas.microsoft.com/office/powerpoint/2012/main"/>
+    </p:ext>
+  </p:extLst>
 </p:presentation>
 </file>
 
@@ -284,7 +291,7 @@
           <a:p>
             <a:fld id="{95AEB02B-0632-4588-96F0-8EF1010AC208}" type="datetimeFigureOut">
               <a:rPr lang="ru-RU" smtClean="0"/>
-              <a:t>10.05.2026</a:t>
+              <a:t>11.05.2026</a:t>
             </a:fld>
             <a:endParaRPr lang="ru-RU"/>
           </a:p>
@@ -512,7 +519,7 @@
           <a:p>
             <a:fld id="{95AEB02B-0632-4588-96F0-8EF1010AC208}" type="datetimeFigureOut">
               <a:rPr lang="ru-RU" smtClean="0"/>
-              <a:t>10.05.2026</a:t>
+              <a:t>11.05.2026</a:t>
             </a:fld>
             <a:endParaRPr lang="ru-RU"/>
           </a:p>
@@ -692,7 +699,7 @@
           <a:p>
             <a:fld id="{95AEB02B-0632-4588-96F0-8EF1010AC208}" type="datetimeFigureOut">
               <a:rPr lang="ru-RU" smtClean="0"/>
-              <a:t>10.05.2026</a:t>
+              <a:t>11.05.2026</a:t>
             </a:fld>
             <a:endParaRPr lang="ru-RU"/>
           </a:p>
@@ -862,7 +869,7 @@
           <a:p>
             <a:fld id="{95AEB02B-0632-4588-96F0-8EF1010AC208}" type="datetimeFigureOut">
               <a:rPr lang="ru-RU" smtClean="0"/>
-              <a:t>10.05.2026</a:t>
+              <a:t>11.05.2026</a:t>
             </a:fld>
             <a:endParaRPr lang="ru-RU"/>
           </a:p>
@@ -1116,7 +1123,7 @@
           <a:p>
             <a:fld id="{95AEB02B-0632-4588-96F0-8EF1010AC208}" type="datetimeFigureOut">
               <a:rPr lang="ru-RU" smtClean="0"/>
-              <a:t>10.05.2026</a:t>
+              <a:t>11.05.2026</a:t>
             </a:fld>
             <a:endParaRPr lang="ru-RU"/>
           </a:p>
@@ -1442,7 +1449,7 @@
           <a:p>
             <a:fld id="{95AEB02B-0632-4588-96F0-8EF1010AC208}" type="datetimeFigureOut">
               <a:rPr lang="ru-RU" smtClean="0"/>
-              <a:t>10.05.2026</a:t>
+              <a:t>11.05.2026</a:t>
             </a:fld>
             <a:endParaRPr lang="ru-RU"/>
           </a:p>
@@ -1893,7 +1900,7 @@
           <a:p>
             <a:fld id="{95AEB02B-0632-4588-96F0-8EF1010AC208}" type="datetimeFigureOut">
               <a:rPr lang="ru-RU" smtClean="0"/>
-              <a:t>10.05.2026</a:t>
+              <a:t>11.05.2026</a:t>
             </a:fld>
             <a:endParaRPr lang="ru-RU"/>
           </a:p>
@@ -2011,7 +2018,7 @@
           <a:p>
             <a:fld id="{95AEB02B-0632-4588-96F0-8EF1010AC208}" type="datetimeFigureOut">
               <a:rPr lang="ru-RU" smtClean="0"/>
-              <a:t>10.05.2026</a:t>
+              <a:t>11.05.2026</a:t>
             </a:fld>
             <a:endParaRPr lang="ru-RU"/>
           </a:p>
@@ -2106,7 +2113,7 @@
           <a:p>
             <a:fld id="{95AEB02B-0632-4588-96F0-8EF1010AC208}" type="datetimeFigureOut">
               <a:rPr lang="ru-RU" smtClean="0"/>
-              <a:t>10.05.2026</a:t>
+              <a:t>11.05.2026</a:t>
             </a:fld>
             <a:endParaRPr lang="ru-RU"/>
           </a:p>
@@ -2393,7 +2400,7 @@
           <a:p>
             <a:fld id="{95AEB02B-0632-4588-96F0-8EF1010AC208}" type="datetimeFigureOut">
               <a:rPr lang="ru-RU" smtClean="0"/>
-              <a:t>10.05.2026</a:t>
+              <a:t>11.05.2026</a:t>
             </a:fld>
             <a:endParaRPr lang="ru-RU"/>
           </a:p>
@@ -2715,7 +2722,7 @@
           <a:p>
             <a:fld id="{95AEB02B-0632-4588-96F0-8EF1010AC208}" type="datetimeFigureOut">
               <a:rPr lang="ru-RU" smtClean="0"/>
-              <a:t>10.05.2026</a:t>
+              <a:t>11.05.2026</a:t>
             </a:fld>
             <a:endParaRPr lang="ru-RU"/>
           </a:p>
@@ -2969,7 +2976,7 @@
           <a:p>
             <a:fld id="{95AEB02B-0632-4588-96F0-8EF1010AC208}" type="datetimeFigureOut">
               <a:rPr lang="ru-RU" smtClean="0"/>
-              <a:t>10.05.2026</a:t>
+              <a:t>11.05.2026</a:t>
             </a:fld>
             <a:endParaRPr lang="ru-RU"/>
           </a:p>
@@ -3699,6 +3706,249 @@
 </p:sld>
 </file>
 
+<file path=ppt/slides/slide11.xml><?xml version="1.0" encoding="utf-8"?>
+<p:sld xmlns:a="http://schemas.openxmlformats.org/drawingml/2006/main" xmlns:r="http://schemas.openxmlformats.org/officeDocument/2006/relationships" xmlns:p="http://schemas.openxmlformats.org/presentationml/2006/main">
+  <p:cSld>
+    <p:spTree>
+      <p:nvGrpSpPr>
+        <p:cNvPr id="1" name=""/>
+        <p:cNvGrpSpPr/>
+        <p:nvPr/>
+      </p:nvGrpSpPr>
+      <p:grpSpPr>
+        <a:xfrm>
+          <a:off x="0" y="0"/>
+          <a:ext cx="0" cy="0"/>
+          <a:chOff x="0" y="0"/>
+          <a:chExt cx="0" cy="0"/>
+        </a:xfrm>
+      </p:grpSpPr>
+      <p:sp>
+        <p:nvSpPr>
+          <p:cNvPr id="2" name="Заголовок 1"/>
+          <p:cNvSpPr>
+            <a:spLocks noGrp="1"/>
+          </p:cNvSpPr>
+          <p:nvPr>
+            <p:ph type="title"/>
+          </p:nvPr>
+        </p:nvSpPr>
+        <p:spPr>
+          <a:xfrm>
+            <a:off x="841248" y="457200"/>
+            <a:ext cx="3340054" cy="1600197"/>
+          </a:xfrm>
+        </p:spPr>
+        <p:txBody>
+          <a:bodyPr/>
+          <a:lstStyle/>
+          <a:p>
+            <a:r>
+              <a:rPr lang="ru-RU" dirty="0" smtClean="0"/>
+              <a:t>Панель администратора</a:t>
+            </a:r>
+            <a:endParaRPr lang="ru-RU" dirty="0"/>
+          </a:p>
+        </p:txBody>
+      </p:sp>
+      <p:sp>
+        <p:nvSpPr>
+          <p:cNvPr id="4" name="Текст 3"/>
+          <p:cNvSpPr>
+            <a:spLocks noGrp="1"/>
+          </p:cNvSpPr>
+          <p:nvPr>
+            <p:ph type="body" sz="half" idx="2"/>
+          </p:nvPr>
+        </p:nvSpPr>
+        <p:spPr/>
+        <p:txBody>
+          <a:bodyPr/>
+          <a:lstStyle/>
+          <a:p>
+            <a:r>
+              <a:rPr lang="ru-RU" dirty="0" smtClean="0"/>
+              <a:t>Приватная страница для добавления кружков, имеющая в себе карту для отображения</a:t>
+            </a:r>
+            <a:r>
+              <a:rPr lang="en-US" dirty="0" smtClean="0"/>
+              <a:t> </a:t>
+            </a:r>
+            <a:r>
+              <a:rPr lang="ru-RU" dirty="0" smtClean="0"/>
+              <a:t>меток, поля для заполнения информации о кружке и кнопка подтверждения.</a:t>
+            </a:r>
+            <a:endParaRPr lang="ru-RU" dirty="0"/>
+          </a:p>
+        </p:txBody>
+      </p:sp>
+      <p:sp>
+        <p:nvSpPr>
+          <p:cNvPr id="3" name="Объект 2"/>
+          <p:cNvSpPr>
+            <a:spLocks noGrp="1"/>
+          </p:cNvSpPr>
+          <p:nvPr>
+            <p:ph idx="1"/>
+          </p:nvPr>
+        </p:nvSpPr>
+        <p:spPr/>
+        <p:txBody>
+          <a:bodyPr/>
+          <a:lstStyle/>
+          <a:p>
+            <a:endParaRPr lang="ru-RU"/>
+          </a:p>
+        </p:txBody>
+      </p:sp>
+      <p:pic>
+        <p:nvPicPr>
+          <p:cNvPr id="5" name="Рисунок 4"/>
+          <p:cNvPicPr>
+            <a:picLocks noChangeAspect="1"/>
+          </p:cNvPicPr>
+          <p:nvPr/>
+        </p:nvPicPr>
+        <p:blipFill>
+          <a:blip r:embed="rId2"/>
+          <a:stretch>
+            <a:fillRect/>
+          </a:stretch>
+        </p:blipFill>
+        <p:spPr>
+          <a:xfrm>
+            <a:off x="4504267" y="685800"/>
+            <a:ext cx="3650518" cy="5487786"/>
+          </a:xfrm>
+          <a:prstGeom prst="rect">
+            <a:avLst/>
+          </a:prstGeom>
+        </p:spPr>
+      </p:pic>
+    </p:spTree>
+    <p:extLst>
+      <p:ext uri="{BB962C8B-B14F-4D97-AF65-F5344CB8AC3E}">
+        <p14:creationId xmlns:p14="http://schemas.microsoft.com/office/powerpoint/2010/main" val="2251281530"/>
+      </p:ext>
+    </p:extLst>
+  </p:cSld>
+  <p:clrMapOvr>
+    <a:masterClrMapping/>
+  </p:clrMapOvr>
+</p:sld>
+</file>
+
+<file path=ppt/slides/slide12.xml><?xml version="1.0" encoding="utf-8"?>
+<p:sld xmlns:a="http://schemas.openxmlformats.org/drawingml/2006/main" xmlns:r="http://schemas.openxmlformats.org/officeDocument/2006/relationships" xmlns:p="http://schemas.openxmlformats.org/presentationml/2006/main">
+  <p:cSld>
+    <p:spTree>
+      <p:nvGrpSpPr>
+        <p:cNvPr id="1" name=""/>
+        <p:cNvGrpSpPr/>
+        <p:nvPr/>
+      </p:nvGrpSpPr>
+      <p:grpSpPr>
+        <a:xfrm>
+          <a:off x="0" y="0"/>
+          <a:ext cx="0" cy="0"/>
+          <a:chOff x="0" y="0"/>
+          <a:chExt cx="0" cy="0"/>
+        </a:xfrm>
+      </p:grpSpPr>
+      <p:sp>
+        <p:nvSpPr>
+          <p:cNvPr id="2" name="Заголовок 1"/>
+          <p:cNvSpPr>
+            <a:spLocks noGrp="1"/>
+          </p:cNvSpPr>
+          <p:nvPr>
+            <p:ph type="title"/>
+          </p:nvPr>
+        </p:nvSpPr>
+        <p:spPr>
+          <a:xfrm>
+            <a:off x="841248" y="457200"/>
+            <a:ext cx="3340054" cy="1600197"/>
+          </a:xfrm>
+        </p:spPr>
+        <p:txBody>
+          <a:bodyPr/>
+          <a:lstStyle/>
+          <a:p>
+            <a:r>
+              <a:rPr lang="ru-RU" dirty="0" smtClean="0"/>
+              <a:t>Демонстрация создания кружка</a:t>
+            </a:r>
+            <a:endParaRPr lang="ru-RU" dirty="0"/>
+          </a:p>
+        </p:txBody>
+      </p:sp>
+      <p:sp>
+        <p:nvSpPr>
+          <p:cNvPr id="4" name="Текст 3"/>
+          <p:cNvSpPr>
+            <a:spLocks noGrp="1"/>
+          </p:cNvSpPr>
+          <p:nvPr>
+            <p:ph type="body" sz="half" idx="2"/>
+          </p:nvPr>
+        </p:nvSpPr>
+        <p:spPr/>
+        <p:txBody>
+          <a:bodyPr/>
+          <a:lstStyle/>
+          <a:p>
+            <a:r>
+              <a:rPr lang="ru-RU" dirty="0" smtClean="0"/>
+              <a:t>Панель без проблем добавляет новый кружок на карту и обновляет карту для </a:t>
+            </a:r>
+            <a:r>
+              <a:rPr lang="ru-RU" smtClean="0"/>
+              <a:t>показа метки.</a:t>
+            </a:r>
+            <a:endParaRPr lang="ru-RU" dirty="0"/>
+          </a:p>
+        </p:txBody>
+      </p:sp>
+      <p:pic>
+        <p:nvPicPr>
+          <p:cNvPr id="6" name="Объект 5"/>
+          <p:cNvPicPr>
+            <a:picLocks noGrp="1" noChangeAspect="1"/>
+          </p:cNvPicPr>
+          <p:nvPr>
+            <p:ph idx="1"/>
+          </p:nvPr>
+        </p:nvPicPr>
+        <p:blipFill>
+          <a:blip r:embed="rId2"/>
+          <a:stretch>
+            <a:fillRect/>
+          </a:stretch>
+        </p:blipFill>
+        <p:spPr>
+          <a:xfrm>
+            <a:off x="4504267" y="687186"/>
+            <a:ext cx="3568823" cy="5486400"/>
+          </a:xfrm>
+          <a:prstGeom prst="rect">
+            <a:avLst/>
+          </a:prstGeom>
+        </p:spPr>
+      </p:pic>
+    </p:spTree>
+    <p:extLst>
+      <p:ext uri="{BB962C8B-B14F-4D97-AF65-F5344CB8AC3E}">
+        <p14:creationId xmlns:p14="http://schemas.microsoft.com/office/powerpoint/2010/main" val="1367774843"/>
+      </p:ext>
+    </p:extLst>
+  </p:cSld>
+  <p:clrMapOvr>
+    <a:masterClrMapping/>
+  </p:clrMapOvr>
+</p:sld>
+</file>
+
 <file path=ppt/slides/slide2.xml><?xml version="1.0" encoding="utf-8"?>
 <p:sld xmlns:a="http://schemas.openxmlformats.org/drawingml/2006/main" xmlns:r="http://schemas.openxmlformats.org/officeDocument/2006/relationships" xmlns:p="http://schemas.openxmlformats.org/presentationml/2006/main">
   <p:cSld>
